--- a/Chapter 6- Final Project/asstes/Presentation Template.pptx
+++ b/Chapter 6- Final Project/asstes/Presentation Template.pptx
@@ -5,16 +5,13 @@
     <p:sldMasterId id="2147483648" r:id="rId1"/>
   </p:sldMasterIdLst>
   <p:sldIdLst>
-    <p:sldId id="256" r:id="rId2"/>
-    <p:sldId id="257" r:id="rId3"/>
-    <p:sldId id="258" r:id="rId4"/>
-    <p:sldId id="259" r:id="rId5"/>
-    <p:sldId id="260" r:id="rId6"/>
-    <p:sldId id="261" r:id="rId7"/>
-    <p:sldId id="262" r:id="rId8"/>
-    <p:sldId id="263" r:id="rId9"/>
-    <p:sldId id="264" r:id="rId10"/>
-    <p:sldId id="265" r:id="rId11"/>
+    <p:sldId id="256" r:id="rId7"/>
+    <p:sldId id="257" r:id="rId8"/>
+    <p:sldId id="258" r:id="rId9"/>
+    <p:sldId id="259" r:id="rId10"/>
+    <p:sldId id="260" r:id="rId11"/>
+    <p:sldId id="261" r:id="rId12"/>
+    <p:sldId id="262" r:id="rId13"/>
   </p:sldIdLst>
   <p:sldSz cx="9144000" cy="6858000" type="screen4x3"/>
   <p:notesSz cx="6858000" cy="9144000"/>
@@ -113,22 +110,6 @@
       </a:defRPr>
     </a:lvl9pPr>
   </p:defaultTextStyle>
-  <p:extLst>
-    <p:ext uri="{EFAFB233-063F-42B5-8137-9DF3F51BA10A}">
-      <p15:sldGuideLst xmlns:p15="http://schemas.microsoft.com/office/powerpoint/2012/main">
-        <p15:guide id="1" orient="horz" pos="2160">
-          <p15:clr>
-            <a:srgbClr val="A4A3A4"/>
-          </p15:clr>
-        </p15:guide>
-        <p15:guide id="2" pos="2880">
-          <p15:clr>
-            <a:srgbClr val="A4A3A4"/>
-          </p15:clr>
-        </p15:guide>
-      </p15:sldGuideLst>
-    </p:ext>
-  </p:extLst>
 </p:presentation>
 </file>
 
@@ -170,9 +151,10 @@
           <a:lstStyle/>
           <a:p>
             <a:r>
-              <a:rPr lang="en-US"/>
+              <a:rPr lang="en-US" smtClean="0"/>
               <a:t>Click to edit Master title style</a:t>
             </a:r>
+            <a:endParaRPr lang="en-US"/>
           </a:p>
         </p:txBody>
       </p:sp>
@@ -288,9 +270,10 @@
           </a:lstStyle>
           <a:p>
             <a:r>
-              <a:rPr lang="en-US"/>
+              <a:rPr lang="en-US" smtClean="0"/>
               <a:t>Click to edit Master subtitle style</a:t>
             </a:r>
+            <a:endParaRPr lang="en-US"/>
           </a:p>
         </p:txBody>
       </p:sp>
@@ -311,7 +294,7 @@
           <a:p>
             <a:fld id="{5BCAD085-E8A6-8845-BD4E-CB4CCA059FC4}" type="datetimeFigureOut">
               <a:rPr lang="en-US" smtClean="0"/>
-              <a:t>3/5/2026</a:t>
+              <a:t>1/27/13</a:t>
             </a:fld>
             <a:endParaRPr lang="en-US"/>
           </a:p>
@@ -405,9 +388,10 @@
           <a:lstStyle/>
           <a:p>
             <a:r>
-              <a:rPr lang="en-US"/>
+              <a:rPr lang="en-US" smtClean="0"/>
               <a:t>Click to edit Master title style</a:t>
             </a:r>
+            <a:endParaRPr lang="en-US"/>
           </a:p>
         </p:txBody>
       </p:sp>
@@ -428,37 +412,38 @@
           <a:p>
             <a:pPr lvl="0"/>
             <a:r>
-              <a:rPr lang="en-US"/>
+              <a:rPr lang="en-US" smtClean="0"/>
               <a:t>Click to edit Master text styles</a:t>
             </a:r>
           </a:p>
           <a:p>
             <a:pPr lvl="1"/>
             <a:r>
-              <a:rPr lang="en-US"/>
+              <a:rPr lang="en-US" smtClean="0"/>
               <a:t>Second level</a:t>
             </a:r>
           </a:p>
           <a:p>
             <a:pPr lvl="2"/>
             <a:r>
-              <a:rPr lang="en-US"/>
+              <a:rPr lang="en-US" smtClean="0"/>
               <a:t>Third level</a:t>
             </a:r>
           </a:p>
           <a:p>
             <a:pPr lvl="3"/>
             <a:r>
-              <a:rPr lang="en-US"/>
+              <a:rPr lang="en-US" smtClean="0"/>
               <a:t>Fourth level</a:t>
             </a:r>
           </a:p>
           <a:p>
             <a:pPr lvl="4"/>
             <a:r>
-              <a:rPr lang="en-US"/>
+              <a:rPr lang="en-US" smtClean="0"/>
               <a:t>Fifth level</a:t>
             </a:r>
+            <a:endParaRPr lang="en-US"/>
           </a:p>
         </p:txBody>
       </p:sp>
@@ -479,7 +464,7 @@
           <a:p>
             <a:fld id="{5BCAD085-E8A6-8845-BD4E-CB4CCA059FC4}" type="datetimeFigureOut">
               <a:rPr lang="en-US" smtClean="0"/>
-              <a:t>3/5/2026</a:t>
+              <a:t>1/27/13</a:t>
             </a:fld>
             <a:endParaRPr lang="en-US"/>
           </a:p>
@@ -578,9 +563,10 @@
           <a:lstStyle/>
           <a:p>
             <a:r>
-              <a:rPr lang="en-US"/>
+              <a:rPr lang="en-US" smtClean="0"/>
               <a:t>Click to edit Master title style</a:t>
             </a:r>
+            <a:endParaRPr lang="en-US"/>
           </a:p>
         </p:txBody>
       </p:sp>
@@ -606,37 +592,38 @@
           <a:p>
             <a:pPr lvl="0"/>
             <a:r>
-              <a:rPr lang="en-US"/>
+              <a:rPr lang="en-US" smtClean="0"/>
               <a:t>Click to edit Master text styles</a:t>
             </a:r>
           </a:p>
           <a:p>
             <a:pPr lvl="1"/>
             <a:r>
-              <a:rPr lang="en-US"/>
+              <a:rPr lang="en-US" smtClean="0"/>
               <a:t>Second level</a:t>
             </a:r>
           </a:p>
           <a:p>
             <a:pPr lvl="2"/>
             <a:r>
-              <a:rPr lang="en-US"/>
+              <a:rPr lang="en-US" smtClean="0"/>
               <a:t>Third level</a:t>
             </a:r>
           </a:p>
           <a:p>
             <a:pPr lvl="3"/>
             <a:r>
-              <a:rPr lang="en-US"/>
+              <a:rPr lang="en-US" smtClean="0"/>
               <a:t>Fourth level</a:t>
             </a:r>
           </a:p>
           <a:p>
             <a:pPr lvl="4"/>
             <a:r>
-              <a:rPr lang="en-US"/>
+              <a:rPr lang="en-US" smtClean="0"/>
               <a:t>Fifth level</a:t>
             </a:r>
+            <a:endParaRPr lang="en-US"/>
           </a:p>
         </p:txBody>
       </p:sp>
@@ -657,7 +644,7 @@
           <a:p>
             <a:fld id="{5BCAD085-E8A6-8845-BD4E-CB4CCA059FC4}" type="datetimeFigureOut">
               <a:rPr lang="en-US" smtClean="0"/>
-              <a:t>3/5/2026</a:t>
+              <a:t>1/27/13</a:t>
             </a:fld>
             <a:endParaRPr lang="en-US"/>
           </a:p>
@@ -751,9 +738,10 @@
           <a:lstStyle/>
           <a:p>
             <a:r>
-              <a:rPr lang="en-US"/>
+              <a:rPr lang="en-US" smtClean="0"/>
               <a:t>Click to edit Master title style</a:t>
             </a:r>
+            <a:endParaRPr lang="en-US"/>
           </a:p>
         </p:txBody>
       </p:sp>
@@ -774,37 +762,38 @@
           <a:p>
             <a:pPr lvl="0"/>
             <a:r>
-              <a:rPr lang="en-US"/>
+              <a:rPr lang="en-US" smtClean="0"/>
               <a:t>Click to edit Master text styles</a:t>
             </a:r>
           </a:p>
           <a:p>
             <a:pPr lvl="1"/>
             <a:r>
-              <a:rPr lang="en-US"/>
+              <a:rPr lang="en-US" smtClean="0"/>
               <a:t>Second level</a:t>
             </a:r>
           </a:p>
           <a:p>
             <a:pPr lvl="2"/>
             <a:r>
-              <a:rPr lang="en-US"/>
+              <a:rPr lang="en-US" smtClean="0"/>
               <a:t>Third level</a:t>
             </a:r>
           </a:p>
           <a:p>
             <a:pPr lvl="3"/>
             <a:r>
-              <a:rPr lang="en-US"/>
+              <a:rPr lang="en-US" smtClean="0"/>
               <a:t>Fourth level</a:t>
             </a:r>
           </a:p>
           <a:p>
             <a:pPr lvl="4"/>
             <a:r>
-              <a:rPr lang="en-US"/>
+              <a:rPr lang="en-US" smtClean="0"/>
               <a:t>Fifth level</a:t>
             </a:r>
+            <a:endParaRPr lang="en-US"/>
           </a:p>
         </p:txBody>
       </p:sp>
@@ -825,7 +814,7 @@
           <a:p>
             <a:fld id="{5BCAD085-E8A6-8845-BD4E-CB4CCA059FC4}" type="datetimeFigureOut">
               <a:rPr lang="en-US" smtClean="0"/>
-              <a:t>3/5/2026</a:t>
+              <a:t>1/27/13</a:t>
             </a:fld>
             <a:endParaRPr lang="en-US"/>
           </a:p>
@@ -928,9 +917,10 @@
           </a:lstStyle>
           <a:p>
             <a:r>
-              <a:rPr lang="en-US"/>
+              <a:rPr lang="en-US" smtClean="0"/>
               <a:t>Click to edit Master title style</a:t>
             </a:r>
+            <a:endParaRPr lang="en-US"/>
           </a:p>
         </p:txBody>
       </p:sp>
@@ -1047,7 +1037,7 @@
           <a:p>
             <a:pPr lvl="0"/>
             <a:r>
-              <a:rPr lang="en-US"/>
+              <a:rPr lang="en-US" smtClean="0"/>
               <a:t>Click to edit Master text styles</a:t>
             </a:r>
           </a:p>
@@ -1070,7 +1060,7 @@
           <a:p>
             <a:fld id="{5BCAD085-E8A6-8845-BD4E-CB4CCA059FC4}" type="datetimeFigureOut">
               <a:rPr lang="en-US" smtClean="0"/>
-              <a:t>3/5/2026</a:t>
+              <a:t>1/27/13</a:t>
             </a:fld>
             <a:endParaRPr lang="en-US"/>
           </a:p>
@@ -1164,9 +1154,10 @@
           <a:lstStyle/>
           <a:p>
             <a:r>
-              <a:rPr lang="en-US"/>
+              <a:rPr lang="en-US" smtClean="0"/>
               <a:t>Click to edit Master title style</a:t>
             </a:r>
+            <a:endParaRPr lang="en-US"/>
           </a:p>
         </p:txBody>
       </p:sp>
@@ -1220,37 +1211,38 @@
           <a:p>
             <a:pPr lvl="0"/>
             <a:r>
-              <a:rPr lang="en-US"/>
+              <a:rPr lang="en-US" smtClean="0"/>
               <a:t>Click to edit Master text styles</a:t>
             </a:r>
           </a:p>
           <a:p>
             <a:pPr lvl="1"/>
             <a:r>
-              <a:rPr lang="en-US"/>
+              <a:rPr lang="en-US" smtClean="0"/>
               <a:t>Second level</a:t>
             </a:r>
           </a:p>
           <a:p>
             <a:pPr lvl="2"/>
             <a:r>
-              <a:rPr lang="en-US"/>
+              <a:rPr lang="en-US" smtClean="0"/>
               <a:t>Third level</a:t>
             </a:r>
           </a:p>
           <a:p>
             <a:pPr lvl="3"/>
             <a:r>
-              <a:rPr lang="en-US"/>
+              <a:rPr lang="en-US" smtClean="0"/>
               <a:t>Fourth level</a:t>
             </a:r>
           </a:p>
           <a:p>
             <a:pPr lvl="4"/>
             <a:r>
-              <a:rPr lang="en-US"/>
+              <a:rPr lang="en-US" smtClean="0"/>
               <a:t>Fifth level</a:t>
             </a:r>
+            <a:endParaRPr lang="en-US"/>
           </a:p>
         </p:txBody>
       </p:sp>
@@ -1304,37 +1296,38 @@
           <a:p>
             <a:pPr lvl="0"/>
             <a:r>
-              <a:rPr lang="en-US"/>
+              <a:rPr lang="en-US" smtClean="0"/>
               <a:t>Click to edit Master text styles</a:t>
             </a:r>
           </a:p>
           <a:p>
             <a:pPr lvl="1"/>
             <a:r>
-              <a:rPr lang="en-US"/>
+              <a:rPr lang="en-US" smtClean="0"/>
               <a:t>Second level</a:t>
             </a:r>
           </a:p>
           <a:p>
             <a:pPr lvl="2"/>
             <a:r>
-              <a:rPr lang="en-US"/>
+              <a:rPr lang="en-US" smtClean="0"/>
               <a:t>Third level</a:t>
             </a:r>
           </a:p>
           <a:p>
             <a:pPr lvl="3"/>
             <a:r>
-              <a:rPr lang="en-US"/>
+              <a:rPr lang="en-US" smtClean="0"/>
               <a:t>Fourth level</a:t>
             </a:r>
           </a:p>
           <a:p>
             <a:pPr lvl="4"/>
             <a:r>
-              <a:rPr lang="en-US"/>
+              <a:rPr lang="en-US" smtClean="0"/>
               <a:t>Fifth level</a:t>
             </a:r>
+            <a:endParaRPr lang="en-US"/>
           </a:p>
         </p:txBody>
       </p:sp>
@@ -1355,7 +1348,7 @@
           <a:p>
             <a:fld id="{5BCAD085-E8A6-8845-BD4E-CB4CCA059FC4}" type="datetimeFigureOut">
               <a:rPr lang="en-US" smtClean="0"/>
-              <a:t>3/5/2026</a:t>
+              <a:t>1/27/13</a:t>
             </a:fld>
             <a:endParaRPr lang="en-US"/>
           </a:p>
@@ -1453,9 +1446,10 @@
           </a:lstStyle>
           <a:p>
             <a:r>
-              <a:rPr lang="en-US"/>
+              <a:rPr lang="en-US" smtClean="0"/>
               <a:t>Click to edit Master title style</a:t>
             </a:r>
+            <a:endParaRPr lang="en-US"/>
           </a:p>
         </p:txBody>
       </p:sp>
@@ -1518,7 +1512,7 @@
           <a:p>
             <a:pPr lvl="0"/>
             <a:r>
-              <a:rPr lang="en-US"/>
+              <a:rPr lang="en-US" smtClean="0"/>
               <a:t>Click to edit Master text styles</a:t>
             </a:r>
           </a:p>
@@ -1574,37 +1568,38 @@
           <a:p>
             <a:pPr lvl="0"/>
             <a:r>
-              <a:rPr lang="en-US"/>
+              <a:rPr lang="en-US" smtClean="0"/>
               <a:t>Click to edit Master text styles</a:t>
             </a:r>
           </a:p>
           <a:p>
             <a:pPr lvl="1"/>
             <a:r>
-              <a:rPr lang="en-US"/>
+              <a:rPr lang="en-US" smtClean="0"/>
               <a:t>Second level</a:t>
             </a:r>
           </a:p>
           <a:p>
             <a:pPr lvl="2"/>
             <a:r>
-              <a:rPr lang="en-US"/>
+              <a:rPr lang="en-US" smtClean="0"/>
               <a:t>Third level</a:t>
             </a:r>
           </a:p>
           <a:p>
             <a:pPr lvl="3"/>
             <a:r>
-              <a:rPr lang="en-US"/>
+              <a:rPr lang="en-US" smtClean="0"/>
               <a:t>Fourth level</a:t>
             </a:r>
           </a:p>
           <a:p>
             <a:pPr lvl="4"/>
             <a:r>
-              <a:rPr lang="en-US"/>
+              <a:rPr lang="en-US" smtClean="0"/>
               <a:t>Fifth level</a:t>
             </a:r>
+            <a:endParaRPr lang="en-US"/>
           </a:p>
         </p:txBody>
       </p:sp>
@@ -1667,7 +1662,7 @@
           <a:p>
             <a:pPr lvl="0"/>
             <a:r>
-              <a:rPr lang="en-US"/>
+              <a:rPr lang="en-US" smtClean="0"/>
               <a:t>Click to edit Master text styles</a:t>
             </a:r>
           </a:p>
@@ -1723,37 +1718,38 @@
           <a:p>
             <a:pPr lvl="0"/>
             <a:r>
-              <a:rPr lang="en-US"/>
+              <a:rPr lang="en-US" smtClean="0"/>
               <a:t>Click to edit Master text styles</a:t>
             </a:r>
           </a:p>
           <a:p>
             <a:pPr lvl="1"/>
             <a:r>
-              <a:rPr lang="en-US"/>
+              <a:rPr lang="en-US" smtClean="0"/>
               <a:t>Second level</a:t>
             </a:r>
           </a:p>
           <a:p>
             <a:pPr lvl="2"/>
             <a:r>
-              <a:rPr lang="en-US"/>
+              <a:rPr lang="en-US" smtClean="0"/>
               <a:t>Third level</a:t>
             </a:r>
           </a:p>
           <a:p>
             <a:pPr lvl="3"/>
             <a:r>
-              <a:rPr lang="en-US"/>
+              <a:rPr lang="en-US" smtClean="0"/>
               <a:t>Fourth level</a:t>
             </a:r>
           </a:p>
           <a:p>
             <a:pPr lvl="4"/>
             <a:r>
-              <a:rPr lang="en-US"/>
+              <a:rPr lang="en-US" smtClean="0"/>
               <a:t>Fifth level</a:t>
             </a:r>
+            <a:endParaRPr lang="en-US"/>
           </a:p>
         </p:txBody>
       </p:sp>
@@ -1774,7 +1770,7 @@
           <a:p>
             <a:fld id="{5BCAD085-E8A6-8845-BD4E-CB4CCA059FC4}" type="datetimeFigureOut">
               <a:rPr lang="en-US" smtClean="0"/>
-              <a:t>3/5/2026</a:t>
+              <a:t>1/27/13</a:t>
             </a:fld>
             <a:endParaRPr lang="en-US"/>
           </a:p>
@@ -1868,9 +1864,10 @@
           <a:lstStyle/>
           <a:p>
             <a:r>
-              <a:rPr lang="en-US"/>
+              <a:rPr lang="en-US" smtClean="0"/>
               <a:t>Click to edit Master title style</a:t>
             </a:r>
+            <a:endParaRPr lang="en-US"/>
           </a:p>
         </p:txBody>
       </p:sp>
@@ -1891,7 +1888,7 @@
           <a:p>
             <a:fld id="{5BCAD085-E8A6-8845-BD4E-CB4CCA059FC4}" type="datetimeFigureOut">
               <a:rPr lang="en-US" smtClean="0"/>
-              <a:t>3/5/2026</a:t>
+              <a:t>1/27/13</a:t>
             </a:fld>
             <a:endParaRPr lang="en-US"/>
           </a:p>
@@ -1986,7 +1983,7 @@
           <a:p>
             <a:fld id="{5BCAD085-E8A6-8845-BD4E-CB4CCA059FC4}" type="datetimeFigureOut">
               <a:rPr lang="en-US" smtClean="0"/>
-              <a:t>3/5/2026</a:t>
+              <a:t>1/27/13</a:t>
             </a:fld>
             <a:endParaRPr lang="en-US"/>
           </a:p>
@@ -2089,9 +2086,10 @@
           </a:lstStyle>
           <a:p>
             <a:r>
-              <a:rPr lang="en-US"/>
+              <a:rPr lang="en-US" smtClean="0"/>
               <a:t>Click to edit Master title style</a:t>
             </a:r>
+            <a:endParaRPr lang="en-US"/>
           </a:p>
         </p:txBody>
       </p:sp>
@@ -2145,37 +2143,38 @@
           <a:p>
             <a:pPr lvl="0"/>
             <a:r>
-              <a:rPr lang="en-US"/>
+              <a:rPr lang="en-US" smtClean="0"/>
               <a:t>Click to edit Master text styles</a:t>
             </a:r>
           </a:p>
           <a:p>
             <a:pPr lvl="1"/>
             <a:r>
-              <a:rPr lang="en-US"/>
+              <a:rPr lang="en-US" smtClean="0"/>
               <a:t>Second level</a:t>
             </a:r>
           </a:p>
           <a:p>
             <a:pPr lvl="2"/>
             <a:r>
-              <a:rPr lang="en-US"/>
+              <a:rPr lang="en-US" smtClean="0"/>
               <a:t>Third level</a:t>
             </a:r>
           </a:p>
           <a:p>
             <a:pPr lvl="3"/>
             <a:r>
-              <a:rPr lang="en-US"/>
+              <a:rPr lang="en-US" smtClean="0"/>
               <a:t>Fourth level</a:t>
             </a:r>
           </a:p>
           <a:p>
             <a:pPr lvl="4"/>
             <a:r>
-              <a:rPr lang="en-US"/>
+              <a:rPr lang="en-US" smtClean="0"/>
               <a:t>Fifth level</a:t>
             </a:r>
+            <a:endParaRPr lang="en-US"/>
           </a:p>
         </p:txBody>
       </p:sp>
@@ -2238,7 +2237,7 @@
           <a:p>
             <a:pPr lvl="0"/>
             <a:r>
-              <a:rPr lang="en-US"/>
+              <a:rPr lang="en-US" smtClean="0"/>
               <a:t>Click to edit Master text styles</a:t>
             </a:r>
           </a:p>
@@ -2261,7 +2260,7 @@
           <a:p>
             <a:fld id="{5BCAD085-E8A6-8845-BD4E-CB4CCA059FC4}" type="datetimeFigureOut">
               <a:rPr lang="en-US" smtClean="0"/>
-              <a:t>3/5/2026</a:t>
+              <a:t>1/27/13</a:t>
             </a:fld>
             <a:endParaRPr lang="en-US"/>
           </a:p>
@@ -2364,9 +2363,10 @@
           </a:lstStyle>
           <a:p>
             <a:r>
-              <a:rPr lang="en-US"/>
+              <a:rPr lang="en-US" smtClean="0"/>
               <a:t>Click to edit Master title style</a:t>
             </a:r>
+            <a:endParaRPr lang="en-US"/>
           </a:p>
         </p:txBody>
       </p:sp>
@@ -2490,7 +2490,7 @@
           <a:p>
             <a:pPr lvl="0"/>
             <a:r>
-              <a:rPr lang="en-US"/>
+              <a:rPr lang="en-US" smtClean="0"/>
               <a:t>Click to edit Master text styles</a:t>
             </a:r>
           </a:p>
@@ -2513,7 +2513,7 @@
           <a:p>
             <a:fld id="{5BCAD085-E8A6-8845-BD4E-CB4CCA059FC4}" type="datetimeFigureOut">
               <a:rPr lang="en-US" smtClean="0"/>
-              <a:t>3/5/2026</a:t>
+              <a:t>1/27/13</a:t>
             </a:fld>
             <a:endParaRPr lang="en-US"/>
           </a:p>
@@ -2622,9 +2622,10 @@
           <a:lstStyle/>
           <a:p>
             <a:r>
-              <a:rPr lang="en-US"/>
+              <a:rPr lang="en-US" smtClean="0"/>
               <a:t>Click to edit Master title style</a:t>
             </a:r>
+            <a:endParaRPr lang="en-US"/>
           </a:p>
         </p:txBody>
       </p:sp>
@@ -2655,37 +2656,38 @@
           <a:p>
             <a:pPr lvl="0"/>
             <a:r>
-              <a:rPr lang="en-US"/>
+              <a:rPr lang="en-US" smtClean="0"/>
               <a:t>Click to edit Master text styles</a:t>
             </a:r>
           </a:p>
           <a:p>
             <a:pPr lvl="1"/>
             <a:r>
-              <a:rPr lang="en-US"/>
+              <a:rPr lang="en-US" smtClean="0"/>
               <a:t>Second level</a:t>
             </a:r>
           </a:p>
           <a:p>
             <a:pPr lvl="2"/>
             <a:r>
-              <a:rPr lang="en-US"/>
+              <a:rPr lang="en-US" smtClean="0"/>
               <a:t>Third level</a:t>
             </a:r>
           </a:p>
           <a:p>
             <a:pPr lvl="3"/>
             <a:r>
-              <a:rPr lang="en-US"/>
+              <a:rPr lang="en-US" smtClean="0"/>
               <a:t>Fourth level</a:t>
             </a:r>
           </a:p>
           <a:p>
             <a:pPr lvl="4"/>
             <a:r>
-              <a:rPr lang="en-US"/>
+              <a:rPr lang="en-US" smtClean="0"/>
               <a:t>Fifth level</a:t>
             </a:r>
+            <a:endParaRPr lang="en-US"/>
           </a:p>
         </p:txBody>
       </p:sp>
@@ -2724,7 +2726,7 @@
           <a:p>
             <a:fld id="{5BCAD085-E8A6-8845-BD4E-CB4CCA059FC4}" type="datetimeFigureOut">
               <a:rPr lang="en-US" smtClean="0"/>
-              <a:t>3/5/2026</a:t>
+              <a:t>1/27/13</a:t>
             </a:fld>
             <a:endParaRPr lang="en-US"/>
           </a:p>
@@ -3083,7 +3085,7 @@
 </file>
 
 <file path=ppt/slides/slide1.xml><?xml version="1.0" encoding="utf-8"?>
-<p:sld xmlns:a="http://schemas.openxmlformats.org/drawingml/2006/main" xmlns:r="http://schemas.openxmlformats.org/officeDocument/2006/relationships" xmlns:p="http://schemas.openxmlformats.org/presentationml/2006/main">
+<p:sld xmlns:a="http://schemas.openxmlformats.org/drawingml/2006/main" xmlns:p="http://schemas.openxmlformats.org/presentationml/2006/main" xmlns:r="http://schemas.openxmlformats.org/officeDocument/2006/relationships">
   <p:cSld>
     <p:spTree>
       <p:nvGrpSpPr>
@@ -3091,14 +3093,7 @@
         <p:cNvGrpSpPr/>
         <p:nvPr/>
       </p:nvGrpSpPr>
-      <p:grpSpPr>
-        <a:xfrm>
-          <a:off x="0" y="0"/>
-          <a:ext cx="0" cy="0"/>
-          <a:chOff x="0" y="0"/>
-          <a:chExt cx="0" cy="0"/>
-        </a:xfrm>
-      </p:grpSpPr>
+      <p:grpSpPr/>
       <p:sp>
         <p:nvSpPr>
           <p:cNvPr id="2" name="Title 1"/>
@@ -3115,7 +3110,7 @@
           <a:lstStyle/>
           <a:p>
             <a:r>
-              <a:t>Title</a:t>
+              <a:t>Onboarding Final Exercise</a:t>
             </a:r>
           </a:p>
         </p:txBody>
@@ -3136,99 +3131,17 @@
           <a:lstStyle/>
           <a:p>
             <a:r>
-              <a:t>Project Name: </a:t>
-            </a:r>
-          </a:p>
-          <a:p>
-            <a:r>
-              <a:t>Team Members: </a:t>
-            </a:r>
-          </a:p>
-          <a:p>
-            <a:r>
-              <a:t>Date:</a:t>
-            </a:r>
-          </a:p>
-        </p:txBody>
-      </p:sp>
-    </p:spTree>
-  </p:cSld>
-  <p:clrMapOvr>
-    <a:masterClrMapping/>
-  </p:clrMapOvr>
-</p:sld>
-</file>
-
-<file path=ppt/slides/slide10.xml><?xml version="1.0" encoding="utf-8"?>
-<p:sld xmlns:a="http://schemas.openxmlformats.org/drawingml/2006/main" xmlns:r="http://schemas.openxmlformats.org/officeDocument/2006/relationships" xmlns:p="http://schemas.openxmlformats.org/presentationml/2006/main">
-  <p:cSld>
-    <p:spTree>
-      <p:nvGrpSpPr>
-        <p:cNvPr id="1" name=""/>
-        <p:cNvGrpSpPr/>
-        <p:nvPr/>
-      </p:nvGrpSpPr>
-      <p:grpSpPr>
-        <a:xfrm>
-          <a:off x="0" y="0"/>
-          <a:ext cx="0" cy="0"/>
-          <a:chOff x="0" y="0"/>
-          <a:chExt cx="0" cy="0"/>
-        </a:xfrm>
-      </p:grpSpPr>
-      <p:sp>
-        <p:nvSpPr>
-          <p:cNvPr id="2" name="Title 1"/>
-          <p:cNvSpPr>
-            <a:spLocks noGrp="1"/>
-          </p:cNvSpPr>
-          <p:nvPr>
-            <p:ph type="title"/>
-          </p:nvPr>
-        </p:nvSpPr>
-        <p:spPr/>
-        <p:txBody>
-          <a:bodyPr/>
-          <a:lstStyle/>
-          <a:p>
-            <a:r>
-              <a:t>Future Improvements</a:t>
-            </a:r>
-          </a:p>
-        </p:txBody>
-      </p:sp>
-      <p:sp>
-        <p:nvSpPr>
-          <p:cNvPr id="3" name="Content Placeholder 2"/>
-          <p:cNvSpPr>
-            <a:spLocks noGrp="1"/>
-          </p:cNvSpPr>
-          <p:nvPr>
-            <p:ph idx="1"/>
-          </p:nvPr>
-        </p:nvSpPr>
-        <p:spPr/>
-        <p:txBody>
-          <a:bodyPr/>
-          <a:lstStyle/>
-          <a:p>
-            <a:r>
-              <a:t>Scaling strategies</a:t>
-            </a:r>
-          </a:p>
-          <a:p>
-            <a:r>
-              <a:t>Performance tuning</a:t>
-            </a:r>
-          </a:p>
-          <a:p>
-            <a:r>
-              <a:t>Operational automation</a:t>
-            </a:r>
-          </a:p>
-          <a:p>
-            <a:r>
-              <a:t>Observability enhancements</a:t>
+              <a:t>Data pipeline architecture design</a:t>
+            </a:r>
+          </a:p>
+          <a:p>
+            <a:r>
+              <a:t>Mentor-approved project idea only</a:t>
+            </a:r>
+          </a:p>
+          <a:p>
+            <a:r>
+              <a:t>Design-focused, no implementation required</a:t>
             </a:r>
           </a:p>
         </p:txBody>
@@ -3242,7 +3155,7 @@
 </file>
 
 <file path=ppt/slides/slide2.xml><?xml version="1.0" encoding="utf-8"?>
-<p:sld xmlns:a="http://schemas.openxmlformats.org/drawingml/2006/main" xmlns:r="http://schemas.openxmlformats.org/officeDocument/2006/relationships" xmlns:p="http://schemas.openxmlformats.org/presentationml/2006/main">
+<p:sld xmlns:a="http://schemas.openxmlformats.org/drawingml/2006/main" xmlns:p="http://schemas.openxmlformats.org/presentationml/2006/main" xmlns:r="http://schemas.openxmlformats.org/officeDocument/2006/relationships">
   <p:cSld>
     <p:spTree>
       <p:nvGrpSpPr>
@@ -3250,14 +3163,7 @@
         <p:cNvGrpSpPr/>
         <p:nvPr/>
       </p:nvGrpSpPr>
-      <p:grpSpPr>
-        <a:xfrm>
-          <a:off x="0" y="0"/>
-          <a:ext cx="0" cy="0"/>
-          <a:chOff x="0" y="0"/>
-          <a:chExt cx="0" cy="0"/>
-        </a:xfrm>
-      </p:grpSpPr>
+      <p:grpSpPr/>
       <p:sp>
         <p:nvSpPr>
           <p:cNvPr id="2" name="Title 1"/>
@@ -3274,7 +3180,7 @@
           <a:lstStyle/>
           <a:p>
             <a:r>
-              <a:t>Project Overview</a:t>
+              <a:t>Exercise Scope</a:t>
             </a:r>
           </a:p>
         </p:txBody>
@@ -3295,17 +3201,22 @@
           <a:lstStyle/>
           <a:p>
             <a:r>
-              <a:t>Objective of the pipeline:</a:t>
-            </a:r>
-          </a:p>
-          <a:p>
-            <a:r>
-              <a:t>Minimal scenario/story to justify tech stack</a:t>
-            </a:r>
-          </a:p>
-          <a:p>
-            <a:r>
-              <a:t>Key data characteristics (volume, frequency, latency)</a:t>
+              <a:t>Design a complete data pipeline architecture using the department stack.</a:t>
+            </a:r>
+          </a:p>
+          <a:p>
+            <a:r>
+              <a:t>Required stack: Kafka / NiFi, Airflow, Spark, Trino, S3/HDFS, Git/VCS, Helm, Argo, and one additional untrained technology.</a:t>
+            </a:r>
+          </a:p>
+          <a:p>
+            <a:r>
+              <a:t>The business scenario is only there to justify the architecture.</a:t>
+            </a:r>
+          </a:p>
+          <a:p>
+            <a:r>
+              <a:t>This is a design presentation, not a coding exercise.</a:t>
             </a:r>
           </a:p>
         </p:txBody>
@@ -3319,7 +3230,7 @@
 </file>
 
 <file path=ppt/slides/slide3.xml><?xml version="1.0" encoding="utf-8"?>
-<p:sld xmlns:a="http://schemas.openxmlformats.org/drawingml/2006/main" xmlns:r="http://schemas.openxmlformats.org/officeDocument/2006/relationships" xmlns:p="http://schemas.openxmlformats.org/presentationml/2006/main">
+<p:sld xmlns:a="http://schemas.openxmlformats.org/drawingml/2006/main" xmlns:p="http://schemas.openxmlformats.org/presentationml/2006/main" xmlns:r="http://schemas.openxmlformats.org/officeDocument/2006/relationships">
   <p:cSld>
     <p:spTree>
       <p:nvGrpSpPr>
@@ -3327,14 +3238,7 @@
         <p:cNvGrpSpPr/>
         <p:nvPr/>
       </p:nvGrpSpPr>
-      <p:grpSpPr>
-        <a:xfrm>
-          <a:off x="0" y="0"/>
-          <a:ext cx="0" cy="0"/>
-          <a:chOff x="0" y="0"/>
-          <a:chExt cx="0" cy="0"/>
-        </a:xfrm>
-      </p:grpSpPr>
+      <p:grpSpPr/>
       <p:sp>
         <p:nvSpPr>
           <p:cNvPr id="2" name="Title 1"/>
@@ -3351,33 +3255,75 @@
           <a:lstStyle/>
           <a:p>
             <a:r>
-              <a:t>End-to-End Pipeline Diagram</a:t>
-            </a:r>
-          </a:p>
-        </p:txBody>
-      </p:sp>
-      <p:sp>
-        <p:nvSpPr>
-          <p:cNvPr id="3" name="Content Placeholder 2"/>
-          <p:cNvSpPr>
-            <a:spLocks noGrp="1"/>
-          </p:cNvSpPr>
-          <p:nvPr>
-            <p:ph idx="1"/>
-          </p:nvPr>
-        </p:nvSpPr>
-        <p:spPr/>
-        <p:txBody>
-          <a:bodyPr/>
-          <a:lstStyle/>
-          <a:p>
-            <a:r>
-              <a:t>Show data flow: ingestion → storage → processing → orchestration → query</a:t>
-            </a:r>
-          </a:p>
-          <a:p>
-            <a:r>
-              <a:t>Highlight technologies used at each stage</a:t>
+              <a:t>Required Technology Stack</a:t>
+            </a:r>
+          </a:p>
+        </p:txBody>
+      </p:sp>
+      <p:sp>
+        <p:nvSpPr>
+          <p:cNvPr id="3" name="TextBox 2"/>
+          <p:cNvSpPr txBox="1"/>
+          <p:nvPr/>
+        </p:nvSpPr>
+        <p:spPr>
+          <a:xfrm>
+            <a:off x="640080" y="1371600"/>
+            <a:ext cx="8046720" cy="4297680"/>
+          </a:xfrm>
+          <a:prstGeom prst="rect">
+            <a:avLst/>
+          </a:prstGeom>
+          <a:noFill/>
+        </p:spPr>
+        <p:txBody>
+          <a:bodyPr wrap="none">
+            <a:spAutoFit/>
+          </a:bodyPr>
+          <a:lstStyle/>
+          <a:p>
+            <a:r>
+              <a:t>Kafka / NiFi - ingestion, buffering, streaming, reliability</a:t>
+            </a:r>
+          </a:p>
+          <a:p>
+            <a:r>
+              <a:t>Airflow - orchestration, retries, and scheduling</a:t>
+            </a:r>
+          </a:p>
+          <a:p>
+            <a:r>
+              <a:t>Spark - distributed processing and transformations</a:t>
+            </a:r>
+          </a:p>
+          <a:p>
+            <a:r>
+              <a:t>Trino - analytics, joins, aggregations, partition pruning</a:t>
+            </a:r>
+          </a:p>
+          <a:p>
+            <a:r>
+              <a:t>S3 / HDFS - storage and partitioning</a:t>
+            </a:r>
+          </a:p>
+          <a:p>
+            <a:r>
+              <a:t>Git / VCS - version control and reproducibility</a:t>
+            </a:r>
+          </a:p>
+          <a:p>
+            <a:r>
+              <a:t>Helm - packaging and deployment consistency</a:t>
+            </a:r>
+          </a:p>
+          <a:p>
+            <a:r>
+              <a:t>Argo - GitOps delivery and environment promotion</a:t>
+            </a:r>
+          </a:p>
+          <a:p>
+            <a:r>
+              <a:t>One extra technology not covered in the training - justified by the design</a:t>
             </a:r>
           </a:p>
         </p:txBody>
@@ -3391,7 +3337,7 @@
 </file>
 
 <file path=ppt/slides/slide4.xml><?xml version="1.0" encoding="utf-8"?>
-<p:sld xmlns:a="http://schemas.openxmlformats.org/drawingml/2006/main" xmlns:r="http://schemas.openxmlformats.org/officeDocument/2006/relationships" xmlns:p="http://schemas.openxmlformats.org/presentationml/2006/main">
+<p:sld xmlns:a="http://schemas.openxmlformats.org/drawingml/2006/main" xmlns:p="http://schemas.openxmlformats.org/presentationml/2006/main" xmlns:r="http://schemas.openxmlformats.org/officeDocument/2006/relationships">
   <p:cSld>
     <p:spTree>
       <p:nvGrpSpPr>
@@ -3399,14 +3345,7 @@
         <p:cNvGrpSpPr/>
         <p:nvPr/>
       </p:nvGrpSpPr>
-      <p:grpSpPr>
-        <a:xfrm>
-          <a:off x="0" y="0"/>
-          <a:ext cx="0" cy="0"/>
-          <a:chOff x="0" y="0"/>
-          <a:chExt cx="0" cy="0"/>
-        </a:xfrm>
-      </p:grpSpPr>
+      <p:grpSpPr/>
       <p:sp>
         <p:nvSpPr>
           <p:cNvPr id="2" name="Title 1"/>
@@ -3423,7 +3362,7 @@
           <a:lstStyle/>
           <a:p>
             <a:r>
-              <a:t>Storage Design</a:t>
+              <a:t>Project Selection Rules</a:t>
             </a:r>
           </a:p>
         </p:txBody>
@@ -3444,17 +3383,22 @@
           <a:lstStyle/>
           <a:p>
             <a:r>
-              <a:t>S3/HDFS layout &amp; partitioning</a:t>
-            </a:r>
-          </a:p>
-          <a:p>
-            <a:r>
-              <a:t>File formats</a:t>
-            </a:r>
-          </a:p>
-          <a:p>
-            <a:r>
-              <a:t>Lifecycle / retention policies</a:t>
+              <a:t>Choose exactly one project from the mentor-provided list.</a:t>
+            </a:r>
+          </a:p>
+          <a:p>
+            <a:r>
+              <a:t>Do not invent your own topic.</a:t>
+            </a:r>
+          </a:p>
+          <a:p>
+            <a:r>
+              <a:t>Do not choose a project outside the approved list.</a:t>
+            </a:r>
+          </a:p>
+          <a:p>
+            <a:r>
+              <a:t>Validate the scope and architecture with the mentor before starting.</a:t>
             </a:r>
           </a:p>
         </p:txBody>
@@ -3468,7 +3412,7 @@
 </file>
 
 <file path=ppt/slides/slide5.xml><?xml version="1.0" encoding="utf-8"?>
-<p:sld xmlns:a="http://schemas.openxmlformats.org/drawingml/2006/main" xmlns:r="http://schemas.openxmlformats.org/officeDocument/2006/relationships" xmlns:p="http://schemas.openxmlformats.org/presentationml/2006/main">
+<p:sld xmlns:a="http://schemas.openxmlformats.org/drawingml/2006/main" xmlns:p="http://schemas.openxmlformats.org/presentationml/2006/main" xmlns:r="http://schemas.openxmlformats.org/officeDocument/2006/relationships">
   <p:cSld>
     <p:spTree>
       <p:nvGrpSpPr>
@@ -3476,14 +3420,7 @@
         <p:cNvGrpSpPr/>
         <p:nvPr/>
       </p:nvGrpSpPr>
-      <p:grpSpPr>
-        <a:xfrm>
-          <a:off x="0" y="0"/>
-          <a:ext cx="0" cy="0"/>
-          <a:chOff x="0" y="0"/>
-          <a:chExt cx="0" cy="0"/>
-        </a:xfrm>
-      </p:grpSpPr>
+      <p:grpSpPr/>
       <p:sp>
         <p:nvSpPr>
           <p:cNvPr id="2" name="Title 1"/>
@@ -3500,7 +3437,7 @@
           <a:lstStyle/>
           <a:p>
             <a:r>
-              <a:t>Processing Layer (Spark)</a:t>
+              <a:t>Required Deliverables</a:t>
             </a:r>
           </a:p>
         </p:txBody>
@@ -3521,22 +3458,42 @@
           <a:lstStyle/>
           <a:p>
             <a:r>
-              <a:t>Job structure / stages</a:t>
-            </a:r>
-          </a:p>
-          <a:p>
-            <a:r>
-              <a:t>Transformations &amp; aggregations</a:t>
-            </a:r>
-          </a:p>
-          <a:p>
-            <a:r>
-              <a:t>Retry &amp; failure handling</a:t>
-            </a:r>
-          </a:p>
-          <a:p>
-            <a:r>
-              <a:t>Scalability considerations</a:t>
+              <a:t>Data movement layer: Kafka / NiFi</a:t>
+            </a:r>
+          </a:p>
+          <a:p>
+            <a:r>
+              <a:t>Airflow orchestration design</a:t>
+            </a:r>
+          </a:p>
+          <a:p>
+            <a:r>
+              <a:t>Spark processing design</a:t>
+            </a:r>
+          </a:p>
+          <a:p>
+            <a:r>
+              <a:t>Storage and partitioning choices</a:t>
+            </a:r>
+          </a:p>
+          <a:p>
+            <a:r>
+              <a:t>Trino query layer and optimization reasoning</a:t>
+            </a:r>
+          </a:p>
+          <a:p>
+            <a:r>
+              <a:t>Git / Helm / Argo deployment strategy</a:t>
+            </a:r>
+          </a:p>
+          <a:p>
+            <a:r>
+              <a:t>Additional untrained technology justification</a:t>
+            </a:r>
+          </a:p>
+          <a:p>
+            <a:r>
+              <a:t>Operational considerations and trade-offs</a:t>
             </a:r>
           </a:p>
         </p:txBody>
@@ -3550,7 +3507,7 @@
 </file>
 
 <file path=ppt/slides/slide6.xml><?xml version="1.0" encoding="utf-8"?>
-<p:sld xmlns:a="http://schemas.openxmlformats.org/drawingml/2006/main" xmlns:r="http://schemas.openxmlformats.org/officeDocument/2006/relationships" xmlns:p="http://schemas.openxmlformats.org/presentationml/2006/main">
+<p:sld xmlns:a="http://schemas.openxmlformats.org/drawingml/2006/main" xmlns:p="http://schemas.openxmlformats.org/presentationml/2006/main" xmlns:r="http://schemas.openxmlformats.org/officeDocument/2006/relationships">
   <p:cSld>
     <p:spTree>
       <p:nvGrpSpPr>
@@ -3558,14 +3515,7 @@
         <p:cNvGrpSpPr/>
         <p:nvPr/>
       </p:nvGrpSpPr>
-      <p:grpSpPr>
-        <a:xfrm>
-          <a:off x="0" y="0"/>
-          <a:ext cx="0" cy="0"/>
-          <a:chOff x="0" y="0"/>
-          <a:chExt cx="0" cy="0"/>
-        </a:xfrm>
-      </p:grpSpPr>
+      <p:grpSpPr/>
       <p:sp>
         <p:nvSpPr>
           <p:cNvPr id="2" name="Title 1"/>
@@ -3582,7 +3532,7 @@
           <a:lstStyle/>
           <a:p>
             <a:r>
-              <a:t>Orchestration (Airflow)</a:t>
+              <a:t>Presentation Focus</a:t>
             </a:r>
           </a:p>
         </p:txBody>
@@ -3603,17 +3553,27 @@
           <a:lstStyle/>
           <a:p>
             <a:r>
-              <a:t>DAG structure / task dependencies</a:t>
-            </a:r>
-          </a:p>
-          <a:p>
-            <a:r>
-              <a:t>Scheduling &amp; backfills</a:t>
-            </a:r>
-          </a:p>
-          <a:p>
-            <a:r>
-              <a:t>Monitoring &amp; alerting</a:t>
+              <a:t>Explain why each technology is included.</a:t>
+            </a:r>
+          </a:p>
+          <a:p>
+            <a:r>
+              <a:t>Show the end-to-end data flow clearly.</a:t>
+            </a:r>
+          </a:p>
+          <a:p>
+            <a:r>
+              <a:t>Discuss architecture decisions and trade-offs.</a:t>
+            </a:r>
+          </a:p>
+          <a:p>
+            <a:r>
+              <a:t>Highlight scalability, reliability, and operational complexity.</a:t>
+            </a:r>
+          </a:p>
+          <a:p>
+            <a:r>
+              <a:t>Keep the scenario short and use it only to support the design.</a:t>
             </a:r>
           </a:p>
         </p:txBody>
@@ -3627,7 +3587,7 @@
 </file>
 
 <file path=ppt/slides/slide7.xml><?xml version="1.0" encoding="utf-8"?>
-<p:sld xmlns:a="http://schemas.openxmlformats.org/drawingml/2006/main" xmlns:r="http://schemas.openxmlformats.org/officeDocument/2006/relationships" xmlns:p="http://schemas.openxmlformats.org/presentationml/2006/main">
+<p:sld xmlns:a="http://schemas.openxmlformats.org/drawingml/2006/main" xmlns:p="http://schemas.openxmlformats.org/presentationml/2006/main" xmlns:r="http://schemas.openxmlformats.org/officeDocument/2006/relationships">
   <p:cSld>
     <p:spTree>
       <p:nvGrpSpPr>
@@ -3635,14 +3595,7 @@
         <p:cNvGrpSpPr/>
         <p:nvPr/>
       </p:nvGrpSpPr>
-      <p:grpSpPr>
-        <a:xfrm>
-          <a:off x="0" y="0"/>
-          <a:ext cx="0" cy="0"/>
-          <a:chOff x="0" y="0"/>
-          <a:chExt cx="0" cy="0"/>
-        </a:xfrm>
-      </p:grpSpPr>
+      <p:grpSpPr/>
       <p:sp>
         <p:nvSpPr>
           <p:cNvPr id="2" name="Title 1"/>
@@ -3659,7 +3612,7 @@
           <a:lstStyle/>
           <a:p>
             <a:r>
-              <a:t>Query Layer (Trino + SQL)</a:t>
+              <a:t>Key Reminder</a:t>
             </a:r>
           </a:p>
         </p:txBody>
@@ -3680,171 +3633,17 @@
           <a:lstStyle/>
           <a:p>
             <a:r>
-              <a:t>Table modeling &amp; partitioning</a:t>
-            </a:r>
-          </a:p>
-          <a:p>
-            <a:r>
-              <a:t>Query examples</a:t>
-            </a:r>
-          </a:p>
-          <a:p>
-            <a:r>
-              <a:t>Optimizations &amp; performance trade-offs</a:t>
-            </a:r>
-          </a:p>
-        </p:txBody>
-      </p:sp>
-    </p:spTree>
-  </p:cSld>
-  <p:clrMapOvr>
-    <a:masterClrMapping/>
-  </p:clrMapOvr>
-</p:sld>
-</file>
-
-<file path=ppt/slides/slide8.xml><?xml version="1.0" encoding="utf-8"?>
-<p:sld xmlns:a="http://schemas.openxmlformats.org/drawingml/2006/main" xmlns:r="http://schemas.openxmlformats.org/officeDocument/2006/relationships" xmlns:p="http://schemas.openxmlformats.org/presentationml/2006/main">
-  <p:cSld>
-    <p:spTree>
-      <p:nvGrpSpPr>
-        <p:cNvPr id="1" name=""/>
-        <p:cNvGrpSpPr/>
-        <p:nvPr/>
-      </p:nvGrpSpPr>
-      <p:grpSpPr>
-        <a:xfrm>
-          <a:off x="0" y="0"/>
-          <a:ext cx="0" cy="0"/>
-          <a:chOff x="0" y="0"/>
-          <a:chExt cx="0" cy="0"/>
-        </a:xfrm>
-      </p:grpSpPr>
-      <p:sp>
-        <p:nvSpPr>
-          <p:cNvPr id="2" name="Title 1"/>
-          <p:cNvSpPr>
-            <a:spLocks noGrp="1"/>
-          </p:cNvSpPr>
-          <p:nvPr>
-            <p:ph type="title"/>
-          </p:nvPr>
-        </p:nvSpPr>
-        <p:spPr/>
-        <p:txBody>
-          <a:bodyPr/>
-          <a:lstStyle/>
-          <a:p>
-            <a:r>
-              <a:t>Operational Considerations</a:t>
-            </a:r>
-          </a:p>
-        </p:txBody>
-      </p:sp>
-      <p:sp>
-        <p:nvSpPr>
-          <p:cNvPr id="3" name="Content Placeholder 2"/>
-          <p:cNvSpPr>
-            <a:spLocks noGrp="1"/>
-          </p:cNvSpPr>
-          <p:nvPr>
-            <p:ph idx="1"/>
-          </p:nvPr>
-        </p:nvSpPr>
-        <p:spPr/>
-        <p:txBody>
-          <a:bodyPr/>
-          <a:lstStyle/>
-          <a:p>
-            <a:r>
-              <a:t>Monitoring &amp; logging</a:t>
-            </a:r>
-          </a:p>
-          <a:p>
-            <a:r>
-              <a:t>Failure recovery strategy</a:t>
-            </a:r>
-          </a:p>
-          <a:p>
-            <a:r>
-              <a:t>Scaling &amp; capacity planning</a:t>
-            </a:r>
-          </a:p>
-        </p:txBody>
-      </p:sp>
-    </p:spTree>
-  </p:cSld>
-  <p:clrMapOvr>
-    <a:masterClrMapping/>
-  </p:clrMapOvr>
-</p:sld>
-</file>
-
-<file path=ppt/slides/slide9.xml><?xml version="1.0" encoding="utf-8"?>
-<p:sld xmlns:a="http://schemas.openxmlformats.org/drawingml/2006/main" xmlns:r="http://schemas.openxmlformats.org/officeDocument/2006/relationships" xmlns:p="http://schemas.openxmlformats.org/presentationml/2006/main">
-  <p:cSld>
-    <p:spTree>
-      <p:nvGrpSpPr>
-        <p:cNvPr id="1" name=""/>
-        <p:cNvGrpSpPr/>
-        <p:nvPr/>
-      </p:nvGrpSpPr>
-      <p:grpSpPr>
-        <a:xfrm>
-          <a:off x="0" y="0"/>
-          <a:ext cx="0" cy="0"/>
-          <a:chOff x="0" y="0"/>
-          <a:chExt cx="0" cy="0"/>
-        </a:xfrm>
-      </p:grpSpPr>
-      <p:sp>
-        <p:nvSpPr>
-          <p:cNvPr id="2" name="Title 1"/>
-          <p:cNvSpPr>
-            <a:spLocks noGrp="1"/>
-          </p:cNvSpPr>
-          <p:nvPr>
-            <p:ph type="title"/>
-          </p:nvPr>
-        </p:nvSpPr>
-        <p:spPr/>
-        <p:txBody>
-          <a:bodyPr/>
-          <a:lstStyle/>
-          <a:p>
-            <a:r>
-              <a:t>Trade-offs &amp; Limitations</a:t>
-            </a:r>
-          </a:p>
-        </p:txBody>
-      </p:sp>
-      <p:sp>
-        <p:nvSpPr>
-          <p:cNvPr id="3" name="Content Placeholder 2"/>
-          <p:cNvSpPr>
-            <a:spLocks noGrp="1"/>
-          </p:cNvSpPr>
-          <p:nvPr>
-            <p:ph idx="1"/>
-          </p:nvPr>
-        </p:nvSpPr>
-        <p:spPr/>
-        <p:txBody>
-          <a:bodyPr/>
-          <a:lstStyle/>
-          <a:p>
-            <a:r>
-              <a:t>Pros &amp; cons of chosen architecture</a:t>
-            </a:r>
-          </a:p>
-          <a:p>
-            <a:r>
-              <a:t>Alternative designs considered</a:t>
-            </a:r>
-          </a:p>
-          <a:p>
-            <a:r>
-              <a:t>Key decisions rationale</a:t>
+              <a:t>This is a design exercise, not a coding assignment.</a:t>
+            </a:r>
+          </a:p>
+          <a:p>
+            <a:r>
+              <a:t>The goal is architecture reasoning, not implementation.</a:t>
+            </a:r>
+          </a:p>
+          <a:p>
+            <a:r>
+              <a:t>Use the mentor list and ask for feedback early.</a:t>
             </a:r>
           </a:p>
         </p:txBody>
